--- a/docs/turboid_analysis.pptx
+++ b/docs/turboid_analysis.pptx
@@ -18682,16 +18682,15 @@
           </p:cNvPicPr>
           <p:nvPr/>
         </p:nvPicPr>
-        <p:blipFill>
+        <p:blipFill rotWithShape="1">
           <a:blip r:embed="rId3"/>
-          <a:stretch>
-            <a:fillRect/>
-          </a:stretch>
+          <a:srcRect l="17571"/>
+          <a:stretch/>
         </p:blipFill>
         <p:spPr>
           <a:xfrm>
-            <a:off x="474503" y="1965309"/>
-            <a:ext cx="11242993" cy="3136731"/>
+            <a:off x="1605437" y="2048432"/>
+            <a:ext cx="9267460" cy="3136731"/>
           </a:xfrm>
           <a:prstGeom prst="rect">
             <a:avLst/>
@@ -18712,7 +18711,7 @@
         </p:nvSpPr>
         <p:spPr>
           <a:xfrm>
-            <a:off x="8029698" y="2877983"/>
+            <a:off x="7185099" y="2961106"/>
             <a:ext cx="1585358" cy="189451"/>
           </a:xfrm>
           <a:prstGeom prst="rect">
@@ -18764,7 +18763,7 @@
         </p:nvSpPr>
         <p:spPr>
           <a:xfrm>
-            <a:off x="8472550" y="3900071"/>
+            <a:off x="7627951" y="3983194"/>
             <a:ext cx="1998817" cy="369332"/>
           </a:xfrm>
           <a:prstGeom prst="rect">
@@ -18807,7 +18806,7 @@
         </p:nvCxnSpPr>
         <p:spPr>
           <a:xfrm>
-            <a:off x="8201891" y="1648691"/>
+            <a:off x="8451802" y="1728199"/>
             <a:ext cx="0" cy="649127"/>
           </a:xfrm>
           <a:prstGeom prst="straightConnector1">
@@ -18849,7 +18848,7 @@
         </p:nvSpPr>
         <p:spPr>
           <a:xfrm>
-            <a:off x="8029698" y="2445789"/>
+            <a:off x="7185099" y="2528912"/>
             <a:ext cx="1585358" cy="373788"/>
           </a:xfrm>
           <a:prstGeom prst="rect">
@@ -18901,7 +18900,7 @@
         </p:nvSpPr>
         <p:spPr>
           <a:xfrm>
-            <a:off x="6691168" y="1275744"/>
+            <a:off x="6749385" y="1358867"/>
             <a:ext cx="3722429" cy="369332"/>
           </a:xfrm>
           <a:prstGeom prst="rect">
@@ -18944,7 +18943,7 @@
         </p:nvCxnSpPr>
         <p:spPr>
           <a:xfrm flipV="1">
-            <a:off x="8963891" y="3196683"/>
+            <a:off x="8119292" y="3279806"/>
             <a:ext cx="0" cy="673982"/>
           </a:xfrm>
           <a:prstGeom prst="straightConnector1">
@@ -18983,7 +18982,7 @@
         </p:nvSpPr>
         <p:spPr>
           <a:xfrm>
-            <a:off x="4223658" y="5349897"/>
+            <a:off x="3379059" y="5433020"/>
             <a:ext cx="5072743" cy="923330"/>
           </a:xfrm>
           <a:prstGeom prst="rect">
@@ -19023,7 +19022,7 @@
         </p:nvCxnSpPr>
         <p:spPr>
           <a:xfrm flipV="1">
-            <a:off x="6474691" y="3280229"/>
+            <a:off x="5630092" y="3363352"/>
             <a:ext cx="1727200" cy="2114705"/>
           </a:xfrm>
           <a:prstGeom prst="straightConnector1">
@@ -19048,6 +19047,85 @@
           </a:fontRef>
         </p:style>
       </p:cxnSp>
+      <p:sp>
+        <p:nvSpPr>
+          <p:cNvPr id="2" name="TextBox 1">
+            <a:extLst>
+              <a:ext uri="{FF2B5EF4-FFF2-40B4-BE49-F238E27FC236}">
+                <a16:creationId xmlns:a16="http://schemas.microsoft.com/office/drawing/2014/main" id="{E9906638-3645-904D-B967-29F2A146A25C}"/>
+              </a:ext>
+            </a:extLst>
+          </p:cNvPr>
+          <p:cNvSpPr txBox="1"/>
+          <p:nvPr/>
+        </p:nvSpPr>
+        <p:spPr>
+          <a:xfrm>
+            <a:off x="1504545" y="1828791"/>
+            <a:ext cx="6203238" cy="338554"/>
+          </a:xfrm>
+          <a:prstGeom prst="rect">
+            <a:avLst/>
+          </a:prstGeom>
+          <a:noFill/>
+        </p:spPr>
+        <p:txBody>
+          <a:bodyPr wrap="square" rtlCol="0">
+            <a:spAutoFit/>
+          </a:bodyPr>
+          <a:lstStyle/>
+          <a:p>
+            <a:r>
+              <a:rPr lang="en-US" sz="800" dirty="0">
+                <a:hlinkClick r:id="rId4"/>
+              </a:rPr>
+              <a:t>https://www.dropbox.com/home/TurboID%20manuscript/Mass-spectrometry%20datasets/03_results/03_downstream_analysis/032723_results</a:t>
+            </a:r>
+            <a:endParaRPr lang="en-US" sz="800" dirty="0"/>
+          </a:p>
+          <a:p>
+            <a:endParaRPr lang="en-US" sz="800" dirty="0"/>
+          </a:p>
+        </p:txBody>
+      </p:sp>
+      <p:sp>
+        <p:nvSpPr>
+          <p:cNvPr id="4" name="TextBox 3">
+            <a:extLst>
+              <a:ext uri="{FF2B5EF4-FFF2-40B4-BE49-F238E27FC236}">
+                <a16:creationId xmlns:a16="http://schemas.microsoft.com/office/drawing/2014/main" id="{84D0BBBF-30A0-6A45-8A69-540FF8A7801C}"/>
+              </a:ext>
+            </a:extLst>
+          </p:cNvPr>
+          <p:cNvSpPr txBox="1"/>
+          <p:nvPr/>
+        </p:nvSpPr>
+        <p:spPr>
+          <a:xfrm>
+            <a:off x="1489407" y="1543533"/>
+            <a:ext cx="1155253" cy="369332"/>
+          </a:xfrm>
+          <a:prstGeom prst="rect">
+            <a:avLst/>
+          </a:prstGeom>
+          <a:noFill/>
+        </p:spPr>
+        <p:txBody>
+          <a:bodyPr wrap="none" rtlCol="0">
+            <a:spAutoFit/>
+          </a:bodyPr>
+          <a:lstStyle/>
+          <a:p>
+            <a:r>
+              <a:rPr lang="en-US" b="1" dirty="0">
+                <a:latin typeface="Segoe UI Semibold" panose="020B0502040204020203" pitchFamily="34" charset="0"/>
+                <a:cs typeface="Segoe UI Semibold" panose="020B0502040204020203" pitchFamily="34" charset="0"/>
+              </a:rPr>
+              <a:t>Dropbox:</a:t>
+            </a:r>
+          </a:p>
+        </p:txBody>
+      </p:sp>
     </p:spTree>
     <p:extLst>
       <p:ext uri="{BB962C8B-B14F-4D97-AF65-F5344CB8AC3E}">

--- a/docs/turboid_analysis.pptx
+++ b/docs/turboid_analysis.pptx
@@ -17854,10 +17854,13 @@
               </a:rPr>
               <a:t>Rhee et al. 2013</a:t>
             </a:r>
-            <a:endParaRPr lang="en-US" sz="2000" b="1" dirty="0">
-              <a:latin typeface="Segoe UI Semibold" panose="020B0502040204020203" pitchFamily="34" charset="0"/>
-              <a:cs typeface="Segoe UI Semibold" panose="020B0502040204020203" pitchFamily="34" charset="0"/>
-            </a:endParaRPr>
+            <a:r>
+              <a:rPr lang="en-US" sz="2000" b="1" dirty="0">
+                <a:latin typeface="Segoe UI Semibold" panose="020B0502040204020203" pitchFamily="34" charset="0"/>
+                <a:cs typeface="Segoe UI Semibold" panose="020B0502040204020203" pitchFamily="34" charset="0"/>
+              </a:rPr>
+              <a:t> (as suggested by Alice Ting)</a:t>
+            </a:r>
           </a:p>
           <a:p>
             <a:pPr algn="l">
